--- a/_mvp_test/ppt-direct-demo/答辩PPT.pptx
+++ b/_mvp_test/ppt-direct-demo/答辩PPT.pptx
@@ -1429,7 +1429,7 @@
           <a:lstStyle/>
           <a:p>
             <a:r>
-              <a:t>讲方法选型理由：FTA 自上而下定因果结构，FMEA 自下而上做风险排序，二者配合是安全性分析的常用组合。两条线以关键故障模式为共同对象连接，互为验证。约 45 秒。</a:t>
+              <a:t>技术路线分四步：先做功能结构分析厘清系统组成，再建立故障树追溯失效原因链，接着用 FMEA 对故障模式做风险排序，最后据此形成维修策略。定性线与定量线以关键故障模式为共同对象，互为验证。约 45 秒。</a:t>
             </a:r>
           </a:p>
         </p:txBody>
@@ -9514,20 +9514,108 @@
       </p:sp>
       <p:sp>
         <p:nvSpPr>
-          <p:cNvPr id="3" name="Rectangle 2"/>
-          <p:cNvSpPr/>
+          <p:cNvPr id="3" name="TextBox 2"/>
+          <p:cNvSpPr txBox="1"/>
           <p:nvPr/>
         </p:nvSpPr>
         <p:spPr>
           <a:xfrm>
-            <a:off x="720000" y="954000"/>
-            <a:ext cx="576000" cy="50400"/>
+            <a:off x="720000" y="324000"/>
+            <a:ext cx="10752119" cy="324000"/>
           </a:xfrm>
           <a:prstGeom prst="rect">
             <a:avLst/>
           </a:prstGeom>
+          <a:noFill/>
+        </p:spPr>
+        <p:txBody>
+          <a:bodyPr wrap="square" anchor="t">
+            <a:spAutoFit/>
+          </a:bodyPr>
+          <a:lstStyle/>
+          <a:p>
+            <a:pPr algn="l">
+              <a:lnSpc>
+                <a:spcPct val="122000"/>
+              </a:lnSpc>
+              <a:spcAft>
+                <a:spcPts val="600"/>
+              </a:spcAft>
+            </a:pPr>
+            <a:r>
+              <a:rPr sz="1200" b="0">
+                <a:solidFill>
+                  <a:srgbClr val="999999"/>
+                </a:solidFill>
+                <a:latin typeface="Calibri"/>
+                <a:ea typeface="微软雅黑"/>
+                <a:cs typeface="微软雅黑"/>
+              </a:rPr>
+              <a:t>第一章 绪论</a:t>
+            </a:r>
+          </a:p>
+        </p:txBody>
+      </p:sp>
+      <p:sp>
+        <p:nvSpPr>
+          <p:cNvPr id="4" name="TextBox 3"/>
+          <p:cNvSpPr txBox="1"/>
+          <p:nvPr/>
+        </p:nvSpPr>
+        <p:spPr>
+          <a:xfrm>
+            <a:off x="720000" y="630000"/>
+            <a:ext cx="10752119" cy="576000"/>
+          </a:xfrm>
+          <a:prstGeom prst="rect">
+            <a:avLst/>
+          </a:prstGeom>
+          <a:noFill/>
+        </p:spPr>
+        <p:txBody>
+          <a:bodyPr wrap="square" anchor="t">
+            <a:spAutoFit/>
+          </a:bodyPr>
+          <a:lstStyle/>
+          <a:p>
+            <a:pPr algn="l">
+              <a:lnSpc>
+                <a:spcPct val="122000"/>
+              </a:lnSpc>
+              <a:spcAft>
+                <a:spcPts val="600"/>
+              </a:spcAft>
+            </a:pPr>
+            <a:r>
+              <a:rPr sz="2600" b="1">
+                <a:solidFill>
+                  <a:srgbClr val="333333"/>
+                </a:solidFill>
+                <a:latin typeface="Calibri"/>
+                <a:ea typeface="微软雅黑"/>
+                <a:cs typeface="微软雅黑"/>
+              </a:rPr>
+              <a:t>研究内容与方法链</a:t>
+            </a:r>
+          </a:p>
+        </p:txBody>
+      </p:sp>
+      <p:sp>
+        <p:nvSpPr>
+          <p:cNvPr id="5" name="Right Arrow 4"/>
+          <p:cNvSpPr/>
+          <p:nvPr/>
+        </p:nvSpPr>
+        <p:spPr>
+          <a:xfrm>
+            <a:off x="3201030" y="3726000"/>
+            <a:ext cx="324000" cy="198000"/>
+          </a:xfrm>
+          <a:prstGeom prst="rightArrow">
+            <a:avLst/>
+          </a:prstGeom>
           <a:solidFill>
-            <a:srgbClr val="F5A623"/>
+            <a:srgbClr val="4A90E2"/>
           </a:solidFill>
           <a:ln>
             <a:noFill/>
@@ -9558,122 +9646,47 @@
       </p:sp>
       <p:sp>
         <p:nvSpPr>
-          <p:cNvPr id="4" name="TextBox 3"/>
-          <p:cNvSpPr txBox="1"/>
+          <p:cNvPr id="6" name="Rounded Rectangle 5"/>
+          <p:cNvSpPr/>
           <p:nvPr/>
         </p:nvSpPr>
         <p:spPr>
           <a:xfrm>
-            <a:off x="720000" y="324000"/>
-            <a:ext cx="10752119" cy="324000"/>
-          </a:xfrm>
-          <a:prstGeom prst="rect">
+            <a:off x="792000" y="3501000"/>
+            <a:ext cx="2409030" cy="648000"/>
+          </a:xfrm>
+          <a:prstGeom prst="roundRect">
             <a:avLst/>
           </a:prstGeom>
-          <a:noFill/>
-        </p:spPr>
-        <p:txBody>
-          <a:bodyPr wrap="square" anchor="t">
-            <a:spAutoFit/>
-          </a:bodyPr>
-          <a:lstStyle/>
-          <a:p>
-            <a:pPr algn="l">
-              <a:lnSpc>
-                <a:spcPct val="122000"/>
-              </a:lnSpc>
-              <a:spcAft>
-                <a:spcPts val="600"/>
-              </a:spcAft>
-            </a:pPr>
-            <a:r>
-              <a:rPr sz="1200" b="0">
-                <a:solidFill>
-                  <a:srgbClr val="999999"/>
-                </a:solidFill>
-                <a:latin typeface="Calibri"/>
-                <a:ea typeface="微软雅黑"/>
-                <a:cs typeface="微软雅黑"/>
-              </a:rPr>
-              <a:t>第一章 绪论</a:t>
-            </a:r>
-          </a:p>
-        </p:txBody>
-      </p:sp>
-      <p:sp>
-        <p:nvSpPr>
-          <p:cNvPr id="5" name="TextBox 4"/>
-          <p:cNvSpPr txBox="1"/>
-          <p:nvPr/>
-        </p:nvSpPr>
-        <p:spPr>
-          <a:xfrm>
-            <a:off x="720000" y="630000"/>
-            <a:ext cx="10752119" cy="576000"/>
-          </a:xfrm>
-          <a:prstGeom prst="rect">
-            <a:avLst/>
-          </a:prstGeom>
-          <a:noFill/>
-        </p:spPr>
-        <p:txBody>
-          <a:bodyPr wrap="square" anchor="t">
-            <a:spAutoFit/>
-          </a:bodyPr>
-          <a:lstStyle/>
-          <a:p>
-            <a:pPr algn="l">
-              <a:lnSpc>
-                <a:spcPct val="122000"/>
-              </a:lnSpc>
-              <a:spcAft>
-                <a:spcPts val="600"/>
-              </a:spcAft>
-            </a:pPr>
-            <a:r>
-              <a:rPr sz="2600" b="1">
-                <a:solidFill>
-                  <a:srgbClr val="333333"/>
-                </a:solidFill>
-                <a:latin typeface="Calibri"/>
-                <a:ea typeface="微软雅黑"/>
-                <a:cs typeface="微软雅黑"/>
-              </a:rPr>
-              <a:t>研究内容与方法链</a:t>
-            </a:r>
-          </a:p>
-        </p:txBody>
-      </p:sp>
-      <p:sp>
-        <p:nvSpPr>
-          <p:cNvPr id="6" name="TextBox 5"/>
-          <p:cNvSpPr txBox="1"/>
-          <p:nvPr/>
-        </p:nvSpPr>
-        <p:spPr>
-          <a:xfrm>
-            <a:off x="792000" y="1224000"/>
-            <a:ext cx="10608120" cy="5130000"/>
-          </a:xfrm>
-          <a:prstGeom prst="rect">
-            <a:avLst/>
-          </a:prstGeom>
-          <a:noFill/>
-        </p:spPr>
-        <p:txBody>
-          <a:bodyPr wrap="square" anchor="t">
-            <a:spAutoFit/>
-          </a:bodyPr>
-          <a:lstStyle/>
-          <a:p>
-            <a:pPr algn="l">
-              <a:lnSpc>
-                <a:spcPct val="122000"/>
-              </a:lnSpc>
-              <a:spcAft>
-                <a:spcPts val="800"/>
-              </a:spcAft>
-            </a:pPr>
+          <a:solidFill>
+            <a:srgbClr val="EAF2FC"/>
+          </a:solidFill>
+          <a:ln w="9525">
+            <a:solidFill>
+              <a:srgbClr val="4A90E2"/>
+            </a:solidFill>
+          </a:ln>
+          <a:effectLst/>
+        </p:spPr>
+        <p:style>
+          <a:lnRef idx="1">
+            <a:schemeClr val="accent1"/>
+          </a:lnRef>
+          <a:fillRef idx="3">
+            <a:schemeClr val="accent1"/>
+          </a:fillRef>
+          <a:effectRef idx="2">
+            <a:schemeClr val="accent1"/>
+          </a:effectRef>
+          <a:fontRef idx="minor">
+            <a:schemeClr val="lt1"/>
+          </a:fontRef>
+        </p:style>
+        <p:txBody>
+          <a:bodyPr rtlCol="0" anchor="ctr" wrap="square" lIns="36000" rIns="36000"/>
+          <a:lstStyle/>
+          <a:p>
+            <a:pPr algn="ctr"/>
             <a:r>
               <a:rPr sz="1800" b="0">
                 <a:solidFill>
@@ -9683,18 +9696,98 @@
                 <a:ea typeface="微软雅黑"/>
                 <a:cs typeface="微软雅黑"/>
               </a:rPr>
-              <a:t>• 四项内容：功能结构分析 → 故障树建模 → FMEA 排序 → 维修策略</a:t>
-            </a:r>
-          </a:p>
-          <a:p>
-            <a:pPr algn="l">
-              <a:lnSpc>
-                <a:spcPct val="122000"/>
-              </a:lnSpc>
-              <a:spcAft>
-                <a:spcPts val="800"/>
-              </a:spcAft>
-            </a:pPr>
+              <a:t>1  功能结构分析</a:t>
+            </a:r>
+          </a:p>
+        </p:txBody>
+      </p:sp>
+      <p:sp>
+        <p:nvSpPr>
+          <p:cNvPr id="7" name="Right Arrow 6"/>
+          <p:cNvSpPr/>
+          <p:nvPr/>
+        </p:nvSpPr>
+        <p:spPr>
+          <a:xfrm>
+            <a:off x="5934060" y="3726000"/>
+            <a:ext cx="324000" cy="198000"/>
+          </a:xfrm>
+          <a:prstGeom prst="rightArrow">
+            <a:avLst/>
+          </a:prstGeom>
+          <a:solidFill>
+            <a:srgbClr val="4A90E2"/>
+          </a:solidFill>
+          <a:ln>
+            <a:noFill/>
+          </a:ln>
+          <a:effectLst/>
+        </p:spPr>
+        <p:style>
+          <a:lnRef idx="1">
+            <a:schemeClr val="accent1"/>
+          </a:lnRef>
+          <a:fillRef idx="3">
+            <a:schemeClr val="accent1"/>
+          </a:fillRef>
+          <a:effectRef idx="2">
+            <a:schemeClr val="accent1"/>
+          </a:effectRef>
+          <a:fontRef idx="minor">
+            <a:schemeClr val="lt1"/>
+          </a:fontRef>
+        </p:style>
+        <p:txBody>
+          <a:bodyPr rtlCol="0" anchor="ctr"/>
+          <a:lstStyle/>
+          <a:p>
+            <a:pPr algn="ctr"/>
+          </a:p>
+        </p:txBody>
+      </p:sp>
+      <p:sp>
+        <p:nvSpPr>
+          <p:cNvPr id="8" name="Rounded Rectangle 7"/>
+          <p:cNvSpPr/>
+          <p:nvPr/>
+        </p:nvSpPr>
+        <p:spPr>
+          <a:xfrm>
+            <a:off x="3525030" y="3501000"/>
+            <a:ext cx="2409030" cy="648000"/>
+          </a:xfrm>
+          <a:prstGeom prst="roundRect">
+            <a:avLst/>
+          </a:prstGeom>
+          <a:solidFill>
+            <a:srgbClr val="EAF2FC"/>
+          </a:solidFill>
+          <a:ln w="9525">
+            <a:solidFill>
+              <a:srgbClr val="4A90E2"/>
+            </a:solidFill>
+          </a:ln>
+          <a:effectLst/>
+        </p:spPr>
+        <p:style>
+          <a:lnRef idx="1">
+            <a:schemeClr val="accent1"/>
+          </a:lnRef>
+          <a:fillRef idx="3">
+            <a:schemeClr val="accent1"/>
+          </a:fillRef>
+          <a:effectRef idx="2">
+            <a:schemeClr val="accent1"/>
+          </a:effectRef>
+          <a:fontRef idx="minor">
+            <a:schemeClr val="lt1"/>
+          </a:fontRef>
+        </p:style>
+        <p:txBody>
+          <a:bodyPr rtlCol="0" anchor="ctr" wrap="square" lIns="36000" rIns="36000"/>
+          <a:lstStyle/>
+          <a:p>
+            <a:pPr algn="ctr"/>
             <a:r>
               <a:rPr sz="1800" b="0">
                 <a:solidFill>
@@ -9704,18 +9797,98 @@
                 <a:ea typeface="微软雅黑"/>
                 <a:cs typeface="微软雅黑"/>
               </a:rPr>
-              <a:t>• 定性线（结构+FTA）回答故障如何发生，定量线（FMEA+可靠度）回答谁更关键</a:t>
-            </a:r>
-          </a:p>
-          <a:p>
-            <a:pPr algn="l">
-              <a:lnSpc>
-                <a:spcPct val="122000"/>
-              </a:lnSpc>
-              <a:spcAft>
-                <a:spcPts val="800"/>
-              </a:spcAft>
-            </a:pPr>
+              <a:t>2  故障树建模</a:t>
+            </a:r>
+          </a:p>
+        </p:txBody>
+      </p:sp>
+      <p:sp>
+        <p:nvSpPr>
+          <p:cNvPr id="9" name="Right Arrow 8"/>
+          <p:cNvSpPr/>
+          <p:nvPr/>
+        </p:nvSpPr>
+        <p:spPr>
+          <a:xfrm>
+            <a:off x="8667090" y="3726000"/>
+            <a:ext cx="324000" cy="198000"/>
+          </a:xfrm>
+          <a:prstGeom prst="rightArrow">
+            <a:avLst/>
+          </a:prstGeom>
+          <a:solidFill>
+            <a:srgbClr val="4A90E2"/>
+          </a:solidFill>
+          <a:ln>
+            <a:noFill/>
+          </a:ln>
+          <a:effectLst/>
+        </p:spPr>
+        <p:style>
+          <a:lnRef idx="1">
+            <a:schemeClr val="accent1"/>
+          </a:lnRef>
+          <a:fillRef idx="3">
+            <a:schemeClr val="accent1"/>
+          </a:fillRef>
+          <a:effectRef idx="2">
+            <a:schemeClr val="accent1"/>
+          </a:effectRef>
+          <a:fontRef idx="minor">
+            <a:schemeClr val="lt1"/>
+          </a:fontRef>
+        </p:style>
+        <p:txBody>
+          <a:bodyPr rtlCol="0" anchor="ctr"/>
+          <a:lstStyle/>
+          <a:p>
+            <a:pPr algn="ctr"/>
+          </a:p>
+        </p:txBody>
+      </p:sp>
+      <p:sp>
+        <p:nvSpPr>
+          <p:cNvPr id="10" name="Rounded Rectangle 9"/>
+          <p:cNvSpPr/>
+          <p:nvPr/>
+        </p:nvSpPr>
+        <p:spPr>
+          <a:xfrm>
+            <a:off x="6258060" y="3501000"/>
+            <a:ext cx="2409030" cy="648000"/>
+          </a:xfrm>
+          <a:prstGeom prst="roundRect">
+            <a:avLst/>
+          </a:prstGeom>
+          <a:solidFill>
+            <a:srgbClr val="EAF2FC"/>
+          </a:solidFill>
+          <a:ln w="9525">
+            <a:solidFill>
+              <a:srgbClr val="4A90E2"/>
+            </a:solidFill>
+          </a:ln>
+          <a:effectLst/>
+        </p:spPr>
+        <p:style>
+          <a:lnRef idx="1">
+            <a:schemeClr val="accent1"/>
+          </a:lnRef>
+          <a:fillRef idx="3">
+            <a:schemeClr val="accent1"/>
+          </a:fillRef>
+          <a:effectRef idx="2">
+            <a:schemeClr val="accent1"/>
+          </a:effectRef>
+          <a:fontRef idx="minor">
+            <a:schemeClr val="lt1"/>
+          </a:fontRef>
+        </p:style>
+        <p:txBody>
+          <a:bodyPr rtlCol="0" anchor="ctr" wrap="square" lIns="36000" rIns="36000"/>
+          <a:lstStyle/>
+          <a:p>
+            <a:pPr algn="ctr"/>
             <a:r>
               <a:rPr sz="1800" b="0">
                 <a:solidFill>
@@ -9725,14 +9898,71 @@
                 <a:ea typeface="微软雅黑"/>
                 <a:cs typeface="微软雅黑"/>
               </a:rPr>
-              <a:t>• 两条线以关键故障模式为共同对象连接，互为验证</a:t>
-            </a:r>
-          </a:p>
-        </p:txBody>
-      </p:sp>
-      <p:sp>
-        <p:nvSpPr>
-          <p:cNvPr id="7" name="TextBox 6"/>
+              <a:t>3  FMEA 排序</a:t>
+            </a:r>
+          </a:p>
+        </p:txBody>
+      </p:sp>
+      <p:sp>
+        <p:nvSpPr>
+          <p:cNvPr id="11" name="Rounded Rectangle 10"/>
+          <p:cNvSpPr/>
+          <p:nvPr/>
+        </p:nvSpPr>
+        <p:spPr>
+          <a:xfrm>
+            <a:off x="8991090" y="3501000"/>
+            <a:ext cx="2409030" cy="648000"/>
+          </a:xfrm>
+          <a:prstGeom prst="roundRect">
+            <a:avLst/>
+          </a:prstGeom>
+          <a:solidFill>
+            <a:srgbClr val="EAF2FC"/>
+          </a:solidFill>
+          <a:ln w="9525">
+            <a:solidFill>
+              <a:srgbClr val="4A90E2"/>
+            </a:solidFill>
+          </a:ln>
+          <a:effectLst/>
+        </p:spPr>
+        <p:style>
+          <a:lnRef idx="1">
+            <a:schemeClr val="accent1"/>
+          </a:lnRef>
+          <a:fillRef idx="3">
+            <a:schemeClr val="accent1"/>
+          </a:fillRef>
+          <a:effectRef idx="2">
+            <a:schemeClr val="accent1"/>
+          </a:effectRef>
+          <a:fontRef idx="minor">
+            <a:schemeClr val="lt1"/>
+          </a:fontRef>
+        </p:style>
+        <p:txBody>
+          <a:bodyPr rtlCol="0" anchor="ctr" wrap="square" lIns="36000" rIns="36000"/>
+          <a:lstStyle/>
+          <a:p>
+            <a:pPr algn="ctr"/>
+            <a:r>
+              <a:rPr sz="1800" b="0">
+                <a:solidFill>
+                  <a:srgbClr val="333333"/>
+                </a:solidFill>
+                <a:latin typeface="Calibri"/>
+                <a:ea typeface="微软雅黑"/>
+                <a:cs typeface="微软雅黑"/>
+              </a:rPr>
+              <a:t>4  维修策略</a:t>
+            </a:r>
+          </a:p>
+        </p:txBody>
+      </p:sp>
+      <p:sp>
+        <p:nvSpPr>
+          <p:cNvPr id="12" name="TextBox 11"/>
           <p:cNvSpPr txBox="1"/>
           <p:nvPr/>
         </p:nvSpPr>
